--- a/chapter3/parts/part-07-real-world-privacy-laws/clip.pptx
+++ b/chapter3/parts/part-07-real-world-privacy-laws/clip.pptx
@@ -4242,7 +4242,7 @@
               </a:defRPr>
             </a:pPr>
             <a:r>
-              <a:t>Chapter 3 — 07 Real World Privacy Laws</a:t>
+              <a:t>Chapter 3 — Real World Privacy Laws</a:t>
             </a:r>
           </a:p>
         </p:txBody>
@@ -4401,7 +4401,7 @@
               </a:defRPr>
             </a:pPr>
             <a:r>
-              <a:t>Chapter 3 — 07 Real World Privacy Laws</a:t>
+              <a:t>Chapter 3 — Real World Privacy Laws</a:t>
             </a:r>
           </a:p>
         </p:txBody>
@@ -4580,7 +4580,7 @@
               </a:defRPr>
             </a:pPr>
             <a:r>
-              <a:t>Chapter 3 — 07 Real World Privacy Laws</a:t>
+              <a:t>Chapter 3 — Real World Privacy Laws</a:t>
             </a:r>
           </a:p>
         </p:txBody>
@@ -4739,7 +4739,7 @@
               </a:defRPr>
             </a:pPr>
             <a:r>
-              <a:t>Chapter 3 — 07 Real World Privacy Laws</a:t>
+              <a:t>Chapter 3 — Real World Privacy Laws</a:t>
             </a:r>
           </a:p>
         </p:txBody>
@@ -4918,7 +4918,7 @@
               </a:defRPr>
             </a:pPr>
             <a:r>
-              <a:t>Chapter 3 — 07 Real World Privacy Laws</a:t>
+              <a:t>Chapter 3 — Real World Privacy Laws</a:t>
             </a:r>
           </a:p>
         </p:txBody>
@@ -5097,7 +5097,7 @@
               </a:defRPr>
             </a:pPr>
             <a:r>
-              <a:t>Chapter 3 — 07 Real World Privacy Laws</a:t>
+              <a:t>Chapter 3 — Real World Privacy Laws</a:t>
             </a:r>
           </a:p>
         </p:txBody>
@@ -5256,7 +5256,7 @@
               </a:defRPr>
             </a:pPr>
             <a:r>
-              <a:t>Chapter 3 — 07 Real World Privacy Laws</a:t>
+              <a:t>Chapter 3 — Real World Privacy Laws</a:t>
             </a:r>
           </a:p>
         </p:txBody>
@@ -5435,7 +5435,7 @@
               </a:defRPr>
             </a:pPr>
             <a:r>
-              <a:t>Chapter 3 — 07 Real World Privacy Laws</a:t>
+              <a:t>Chapter 3 — Real World Privacy Laws</a:t>
             </a:r>
           </a:p>
         </p:txBody>
@@ -5634,7 +5634,7 @@
               </a:defRPr>
             </a:pPr>
             <a:r>
-              <a:t>Chapter 3 — 07 Real World Privacy Laws</a:t>
+              <a:t>Chapter 3 — Real World Privacy Laws</a:t>
             </a:r>
           </a:p>
         </p:txBody>
@@ -5813,7 +5813,7 @@
               </a:defRPr>
             </a:pPr>
             <a:r>
-              <a:t>Chapter 3 — 07 Real World Privacy Laws</a:t>
+              <a:t>Chapter 3 — Real World Privacy Laws</a:t>
             </a:r>
           </a:p>
         </p:txBody>

--- a/chapter3/parts/part-07-real-world-privacy-laws/clip.pptx
+++ b/chapter3/parts/part-07-real-world-privacy-laws/clip.pptx
@@ -4326,10 +4326,12 @@
           </a:bodyPr>
           <a:lstStyle/>
           <a:p>
-            <a:pPr>
+            <a:pPr lvl="0" marL="457200" indent="-228600">
+              <a:buFont typeface="Calibri"/>
               <a:spcAft>
                 <a:spcPts val="1000"/>
               </a:spcAft>
+              <a:buSzPct val="100000"/>
               <a:buChar char="•"/>
               <a:lnSpc>
                 <a:spcPts val="2200"/>
@@ -4346,10 +4348,12 @@
             </a:r>
           </a:p>
           <a:p>
-            <a:pPr>
+            <a:pPr lvl="0" marL="457200" indent="-228600">
+              <a:buFont typeface="Calibri"/>
               <a:spcAft>
                 <a:spcPts val="1000"/>
               </a:spcAft>
+              <a:buSzPct val="100000"/>
               <a:buChar char="•"/>
               <a:lnSpc>
                 <a:spcPts val="2200"/>
@@ -4485,10 +4489,12 @@
           </a:bodyPr>
           <a:lstStyle/>
           <a:p>
-            <a:pPr>
+            <a:pPr lvl="0" marL="457200" indent="-228600">
+              <a:buFont typeface="Calibri"/>
               <a:spcAft>
                 <a:spcPts val="1000"/>
               </a:spcAft>
+              <a:buSzPct val="100000"/>
               <a:buChar char="•"/>
               <a:lnSpc>
                 <a:spcPts val="2200"/>
@@ -4505,10 +4511,12 @@
             </a:r>
           </a:p>
           <a:p>
-            <a:pPr>
+            <a:pPr lvl="0" marL="457200" indent="-228600">
+              <a:buFont typeface="Calibri"/>
               <a:spcAft>
                 <a:spcPts val="1000"/>
               </a:spcAft>
+              <a:buSzPct val="100000"/>
               <a:buChar char="•"/>
               <a:lnSpc>
                 <a:spcPts val="2200"/>
@@ -4525,10 +4533,12 @@
             </a:r>
           </a:p>
           <a:p>
-            <a:pPr>
+            <a:pPr lvl="0" marL="457200" indent="-228600">
+              <a:buFont typeface="Calibri"/>
               <a:spcAft>
                 <a:spcPts val="1000"/>
               </a:spcAft>
+              <a:buSzPct val="100000"/>
               <a:buChar char="•"/>
               <a:lnSpc>
                 <a:spcPts val="2200"/>
@@ -4664,10 +4674,12 @@
           </a:bodyPr>
           <a:lstStyle/>
           <a:p>
-            <a:pPr>
+            <a:pPr lvl="0" marL="457200" indent="-228600">
+              <a:buFont typeface="Calibri"/>
               <a:spcAft>
                 <a:spcPts val="1000"/>
               </a:spcAft>
+              <a:buSzPct val="100000"/>
               <a:buChar char="•"/>
               <a:lnSpc>
                 <a:spcPts val="2200"/>
@@ -4684,10 +4696,12 @@
             </a:r>
           </a:p>
           <a:p>
-            <a:pPr>
+            <a:pPr lvl="0" marL="457200" indent="-228600">
+              <a:buFont typeface="Calibri"/>
               <a:spcAft>
                 <a:spcPts val="1000"/>
               </a:spcAft>
+              <a:buSzPct val="100000"/>
               <a:buChar char="•"/>
               <a:lnSpc>
                 <a:spcPts val="2200"/>
@@ -4823,10 +4837,12 @@
           </a:bodyPr>
           <a:lstStyle/>
           <a:p>
-            <a:pPr>
+            <a:pPr lvl="0" marL="457200" indent="-228600">
+              <a:buFont typeface="Calibri"/>
               <a:spcAft>
                 <a:spcPts val="1000"/>
               </a:spcAft>
+              <a:buSzPct val="100000"/>
               <a:buChar char="•"/>
               <a:lnSpc>
                 <a:spcPts val="2200"/>
@@ -4843,10 +4859,12 @@
             </a:r>
           </a:p>
           <a:p>
-            <a:pPr>
+            <a:pPr lvl="0" marL="457200" indent="-228600">
+              <a:buFont typeface="Calibri"/>
               <a:spcAft>
                 <a:spcPts val="1000"/>
               </a:spcAft>
+              <a:buSzPct val="100000"/>
               <a:buChar char="•"/>
               <a:lnSpc>
                 <a:spcPts val="2200"/>
@@ -4863,10 +4881,12 @@
             </a:r>
           </a:p>
           <a:p>
-            <a:pPr>
+            <a:pPr lvl="0" marL="457200" indent="-228600">
+              <a:buFont typeface="Calibri"/>
               <a:spcAft>
                 <a:spcPts val="1000"/>
               </a:spcAft>
+              <a:buSzPct val="100000"/>
               <a:buChar char="•"/>
               <a:lnSpc>
                 <a:spcPts val="2200"/>
@@ -5002,10 +5022,12 @@
           </a:bodyPr>
           <a:lstStyle/>
           <a:p>
-            <a:pPr>
+            <a:pPr lvl="0" marL="457200" indent="-228600">
+              <a:buFont typeface="Calibri"/>
               <a:spcAft>
                 <a:spcPts val="1000"/>
               </a:spcAft>
+              <a:buSzPct val="100000"/>
               <a:buChar char="•"/>
               <a:lnSpc>
                 <a:spcPts val="2200"/>
@@ -5022,10 +5044,12 @@
             </a:r>
           </a:p>
           <a:p>
-            <a:pPr>
+            <a:pPr lvl="0" marL="457200" indent="-228600">
+              <a:buFont typeface="Calibri"/>
               <a:spcAft>
                 <a:spcPts val="1000"/>
               </a:spcAft>
+              <a:buSzPct val="100000"/>
               <a:buChar char="•"/>
               <a:lnSpc>
                 <a:spcPts val="2200"/>
@@ -5042,10 +5066,12 @@
             </a:r>
           </a:p>
           <a:p>
-            <a:pPr>
+            <a:pPr lvl="0" marL="457200" indent="-228600">
+              <a:buFont typeface="Calibri"/>
               <a:spcAft>
                 <a:spcPts val="1000"/>
               </a:spcAft>
+              <a:buSzPct val="100000"/>
               <a:buChar char="•"/>
               <a:lnSpc>
                 <a:spcPts val="2200"/>
@@ -5181,10 +5207,12 @@
           </a:bodyPr>
           <a:lstStyle/>
           <a:p>
-            <a:pPr>
+            <a:pPr lvl="0" marL="457200" indent="-228600">
+              <a:buFont typeface="Calibri"/>
               <a:spcAft>
                 <a:spcPts val="1000"/>
               </a:spcAft>
+              <a:buSzPct val="100000"/>
               <a:buChar char="•"/>
               <a:lnSpc>
                 <a:spcPts val="2200"/>
@@ -5201,10 +5229,12 @@
             </a:r>
           </a:p>
           <a:p>
-            <a:pPr>
+            <a:pPr lvl="0" marL="457200" indent="-228600">
+              <a:buFont typeface="Calibri"/>
               <a:spcAft>
                 <a:spcPts val="1000"/>
               </a:spcAft>
+              <a:buSzPct val="100000"/>
               <a:buChar char="•"/>
               <a:lnSpc>
                 <a:spcPts val="2200"/>
@@ -5340,10 +5370,12 @@
           </a:bodyPr>
           <a:lstStyle/>
           <a:p>
-            <a:pPr>
+            <a:pPr lvl="0" marL="457200" indent="-228600">
+              <a:buFont typeface="Calibri"/>
               <a:spcAft>
                 <a:spcPts val="1000"/>
               </a:spcAft>
+              <a:buSzPct val="100000"/>
               <a:buChar char="•"/>
               <a:lnSpc>
                 <a:spcPts val="2200"/>
@@ -5360,10 +5392,12 @@
             </a:r>
           </a:p>
           <a:p>
-            <a:pPr>
+            <a:pPr lvl="0" marL="457200" indent="-228600">
+              <a:buFont typeface="Calibri"/>
               <a:spcAft>
                 <a:spcPts val="1000"/>
               </a:spcAft>
+              <a:buSzPct val="100000"/>
               <a:buChar char="•"/>
               <a:lnSpc>
                 <a:spcPts val="2200"/>
@@ -5380,10 +5414,12 @@
             </a:r>
           </a:p>
           <a:p>
-            <a:pPr>
+            <a:pPr lvl="0" marL="457200" indent="-228600">
+              <a:buFont typeface="Calibri"/>
               <a:spcAft>
                 <a:spcPts val="1000"/>
               </a:spcAft>
+              <a:buSzPct val="100000"/>
               <a:buChar char="•"/>
               <a:lnSpc>
                 <a:spcPts val="2200"/>
@@ -5519,10 +5555,12 @@
           </a:bodyPr>
           <a:lstStyle/>
           <a:p>
-            <a:pPr>
+            <a:pPr lvl="0" marL="457200" indent="-228600">
+              <a:buFont typeface="Calibri"/>
               <a:spcAft>
                 <a:spcPts val="1000"/>
               </a:spcAft>
+              <a:buSzPct val="100000"/>
               <a:buChar char="•"/>
               <a:lnSpc>
                 <a:spcPts val="2200"/>
@@ -5539,10 +5577,12 @@
             </a:r>
           </a:p>
           <a:p>
-            <a:pPr>
+            <a:pPr lvl="0" marL="457200" indent="-228600">
+              <a:buFont typeface="Calibri"/>
               <a:spcAft>
                 <a:spcPts val="1000"/>
               </a:spcAft>
+              <a:buSzPct val="100000"/>
               <a:buChar char="•"/>
               <a:lnSpc>
                 <a:spcPts val="2200"/>
@@ -5559,10 +5599,12 @@
             </a:r>
           </a:p>
           <a:p>
-            <a:pPr>
+            <a:pPr lvl="0" marL="457200" indent="-228600">
+              <a:buFont typeface="Calibri"/>
               <a:spcAft>
                 <a:spcPts val="1000"/>
               </a:spcAft>
+              <a:buSzPct val="100000"/>
               <a:buChar char="•"/>
               <a:lnSpc>
                 <a:spcPts val="2200"/>
@@ -5579,10 +5621,12 @@
             </a:r>
           </a:p>
           <a:p>
-            <a:pPr>
+            <a:pPr lvl="0" marL="457200" indent="-228600">
+              <a:buFont typeface="Calibri"/>
               <a:spcAft>
                 <a:spcPts val="1000"/>
               </a:spcAft>
+              <a:buSzPct val="100000"/>
               <a:buChar char="•"/>
               <a:lnSpc>
                 <a:spcPts val="2200"/>
@@ -5718,10 +5762,12 @@
           </a:bodyPr>
           <a:lstStyle/>
           <a:p>
-            <a:pPr>
+            <a:pPr lvl="0" marL="457200" indent="-228600">
+              <a:buFont typeface="Calibri"/>
               <a:spcAft>
                 <a:spcPts val="1000"/>
               </a:spcAft>
+              <a:buSzPct val="100000"/>
               <a:buChar char="•"/>
               <a:lnSpc>
                 <a:spcPts val="2200"/>
@@ -5738,10 +5784,12 @@
             </a:r>
           </a:p>
           <a:p>
-            <a:pPr>
+            <a:pPr lvl="0" marL="457200" indent="-228600">
+              <a:buFont typeface="Calibri"/>
               <a:spcAft>
                 <a:spcPts val="1000"/>
               </a:spcAft>
+              <a:buSzPct val="100000"/>
               <a:buChar char="•"/>
               <a:lnSpc>
                 <a:spcPts val="2200"/>
@@ -5758,10 +5806,12 @@
             </a:r>
           </a:p>
           <a:p>
-            <a:pPr>
+            <a:pPr lvl="0" marL="457200" indent="-228600">
+              <a:buFont typeface="Calibri"/>
               <a:spcAft>
                 <a:spcPts val="1000"/>
               </a:spcAft>
+              <a:buSzPct val="100000"/>
               <a:buChar char="•"/>
               <a:lnSpc>
                 <a:spcPts val="2200"/>
